--- a/dist/초5/사회·역사/권리와생활/초5_사회·역사_권리와생활_03_경제적선택.pptx
+++ b/dist/초5/사회·역사/권리와생활/초5_사회·역사_권리와생활_03_경제적선택.pptx
@@ -120,20 +120,20 @@
   <p:extLst>
     <p:ext uri="{521415D9-36F7-43E2-AB2F-B90AF26B5E84}">
       <p14:sectionLst xmlns:p14="http://schemas.microsoft.com/office/powerpoint/2010/main">
-        <p14:section name="도입" id="{a896530b-0b42-620a-5806-5baea9026271}">
+        <p14:section name="도입" id="{e63317c7-db62-5182-7aeb-00661be3c490}">
           <p14:sldIdLst>
             <p14:sldId id="256"/>
             <p14:sldId id="257"/>
           </p14:sldIdLst>
         </p14:section>
-        <p14:section name="개념" id="{d797415a-94b9-4346-4cd7-9a3b39b71275}">
+        <p14:section name="개념" id="{198203f4-0d00-9f7a-78fc-967860e6a03c}">
           <p14:sldIdLst>
             <p14:sldId id="258"/>
             <p14:sldId id="259"/>
             <p14:sldId id="262"/>
           </p14:sldIdLst>
         </p14:section>
-        <p14:section name="연습" id="{c790cc9a-e630-82b8-9b66-04b0bf79f7a0}">
+        <p14:section name="연습" id="{5a8a3bb8-baff-c614-5c0c-56a41af13241}">
           <p14:sldIdLst>
             <p14:sldId id="260"/>
             <p14:sldId id="261"/>
@@ -141,25 +141,25 @@
             <p14:sldId id="264"/>
           </p14:sldIdLst>
         </p14:section>
-        <p14:section name="개념" id="{7fa015e9-f602-965c-84b8-01741c85e5ed}">
+        <p14:section name="개념" id="{81c07fae-b9ad-608d-ea4a-91602266f6a0}">
           <p14:sldIdLst/>
         </p14:section>
-        <p14:section name="연습" id="{4b383727-29f6-3fee-4e72-8330a30445dd}">
+        <p14:section name="연습" id="{38e1450f-8670-631f-e9c3-5659f6d53449}">
           <p14:sldIdLst/>
         </p14:section>
-        <p14:section name="확인" id="{0770df11-02d2-680e-d66b-053d2e7acc81}">
+        <p14:section name="확인" id="{f56d8e55-5bc1-4fec-3aba-0525fccb3543}">
           <p14:sldIdLst>
             <p14:sldId id="265"/>
             <p14:sldId id="266"/>
             <p14:sldId id="267"/>
           </p14:sldIdLst>
         </p14:section>
-        <p14:section name="정리" id="{ccf0340a-03ac-0e02-d623-9db9102e9673}">
+        <p14:section name="정리" id="{6999d022-df15-71d7-ed41-26be823103ff}">
           <p14:sldIdLst>
             <p14:sldId id="268"/>
           </p14:sldIdLst>
         </p14:section>
-        <p14:section name="보충" id="{d16f297f-5070-9477-713e-b06953758ff9}">
+        <p14:section name="보충" id="{b9b23bd4-b106-0719-f494-05e3e7f6973b}">
           <p14:sldIdLst>
             <p14:sldId id="269"/>
           </p14:sldIdLst>
@@ -1082,7 +1082,7 @@
 막히면
 - 천 원 카드만으로 ‘천, 이천, 삼천…’ 하고 세는 것부터 합니다.
 주의
-- 계획상 이 차시의 선수 차시는 ‘법과 규칙’(KR22-G05-SOC-LAW-L01)이지만, 오늘 내용과 직접 이어지는 것은 4학년 ‘필요와 선택’(KR22-G04-SOC-SCARCITY-L01)입니다. 희소성과 선택이 흔들리면 그 차시를 먼저 합니다.
+- 오늘 내용과 직접 이어지는 앞 차시는 4학년 ‘필요와 선택’(KR22-G04-SOC-SCARCITY-L01)입니다. 희소성과 선택이 흔들리면 그 차시를 먼저 합니다.
 - 돈 계산이 많이 어려우면 3학년 수학 ‘세 자리 수의 덧셈’(KR22-G03-MAT-ADD3D-L01)·‘세 자리 수의 뺄셈’(KR22-G03-MAT-SUB3D-L01)부터 다시 봅니다.
 - 보충이 오래 걸리면 오늘은 여기까지 하고 다음 날 S02부터 다시 시작합니다.</a:t>
             </a:r>
